--- a/week-01/presentations/ppts/day-03-building-validating-personas.pptx
+++ b/week-01/presentations/ppts/day-03-building-validating-personas.pptx
@@ -7476,16 +7476,7 @@
             </a:pPr>
             <a:r>
               <a:rPr/>
-              <a:t>Job: CMO · Age: 38 · Income: $150k · Hobbies: yoga</a:t>
-            </a:r>
-          </a:p>
-          <a:p>
-            <a:pPr lvl="0" indent="0" marL="0">
-              <a:buNone/>
-            </a:pPr>
-            <a:r>
-              <a:rPr/>
-              <a:t>Mary wants to grow her business and loves data-driven insights. She’s busy and values efficiency.</a:t>
+              <a:t>Job: CMO · Age: 38 · Income: $150k · Hobbies: yoga Mary wants to grow her business and loves data-driven insights. She’s busy and values efficiency.</a:t>
             </a:r>
           </a:p>
           <a:p>

--- a/week-01/presentations/ppts/day-03-building-validating-personas.pptx
+++ b/week-01/presentations/ppts/day-03-building-validating-personas.pptx
@@ -5677,6 +5677,43 @@
             <a:r>
               <a:rPr/>
               <a:t>🧠 Using AI Safely for Persona Drafting</a:t>
+            </a:r>
+          </a:p>
+        </p:txBody>
+      </p:sp>
+      <p:sp>
+        <p:nvSpPr>
+          <p:cNvPr id="3" name="Content Placeholder 2"/>
+          <p:cNvSpPr>
+            <a:spLocks noGrp="1"/>
+          </p:cNvSpPr>
+          <p:nvPr>
+            <p:ph idx="1"/>
+          </p:nvPr>
+        </p:nvSpPr>
+        <p:spPr/>
+        <p:txBody>
+          <a:bodyPr/>
+          <a:lstStyle/>
+          <a:p>
+            <a:pPr lvl="0" indent="0">
+              <a:buNone/>
+            </a:pPr>
+            <a:r>
+              <a:rPr>
+                <a:latin typeface="Courier"/>
+              </a:rPr>
+              <a:t>Role: Research assistant helping a TPM build an evidence-grounded persona.
+Context:
+- The user role is Lead Dispatcher at a 50–200 tech HVAC company.
+- Observed behaviors (tier: Observed): [paste notes from ride-along]
+- Reported statements (tier: Reported): [paste 6 interview quotes]
+Constraints:
+- Do NOT invent behaviors or quotes.
+- Every claim in your output must cite one of the notes or quotes above, OR be flagged as Inferred.
+- If you generate any claim not grounded in the inputs, tag it AI-generated with a note: "validate before use."
+Format: Persona Validation Canvas (6 sections).
+</a:t>
             </a:r>
           </a:p>
         </p:txBody>

--- a/week-01/presentations/ppts/day-03-building-validating-personas.pptx
+++ b/week-01/presentations/ppts/day-03-building-validating-personas.pptx
@@ -1202,7 +1202,7 @@
             </a:pPr>
             <a:r>
               <a:rPr/>
-              <a:t>Final block: take the persona and try to break it. Triads that pass the stress-test leave with something they’d defend to an engineer.</a:t>
+              <a:t>Final block: take the persona and try to break it. Quads that pass the stress-test leave with something they’d defend to an engineer.</a:t>
             </a:r>
           </a:p>
         </p:txBody>
@@ -1530,7 +1530,7 @@
             </a:pPr>
             <a:r>
               <a:rPr/>
-              <a:t>“Dropping a claim” publicly is the hardest thing we ask all week. Celebrate triads that do it honestly.</a:t>
+              <a:t>“Dropping a claim” publicly is the hardest thing we ask all week. Celebrate quads that do it honestly.</a:t>
             </a:r>
           </a:p>
         </p:txBody>
@@ -1694,7 +1694,7 @@
             </a:pPr>
             <a:r>
               <a:rPr/>
-              <a:t>Closing reflection. The unvalidated-assumption answer often becomes a triad’s first Day 4 pain-extraction target.</a:t>
+              <a:t>Closing reflection. The unvalidated-assumption answer often becomes a quad’s first Day 4 pain-extraction target.</a:t>
             </a:r>
           </a:p>
         </p:txBody>
@@ -2186,7 +2186,7 @@
             </a:pPr>
             <a:r>
               <a:rPr/>
-              <a:t>One of the three provided personas is intentionally good. Make sure triads notice — not every persona is broken.</a:t>
+              <a:t>One of the three provided personas is intentionally good. Make sure quads notice — not every persona is broken.</a:t>
             </a:r>
           </a:p>
         </p:txBody>
@@ -5788,16 +5788,16 @@
             </a:pPr>
             <a:r>
               <a:rPr b="1"/>
-              <a:t>Triads • 45 minutes</a:t>
-            </a:r>
-          </a:p>
-          <a:p>
-            <a:pPr lvl="0" indent="0" marL="0">
-              <a:buNone/>
-            </a:pPr>
-            <a:r>
-              <a:rPr/>
-              <a:t>Your triad has PR/FAQ customer quote + whatever assumptions you’re carrying. Build a canvas-format persona for the primary customer in your product idea.</a:t>
+              <a:t>Quads • 45 minutes</a:t>
+            </a:r>
+          </a:p>
+          <a:p>
+            <a:pPr lvl="0" indent="0" marL="0">
+              <a:buNone/>
+            </a:pPr>
+            <a:r>
+              <a:rPr/>
+              <a:t>Your quad has PR/FAQ customer quote + whatever assumptions you’re carrying. Build a canvas-format persona for the primary customer in your product idea.</a:t>
             </a:r>
           </a:p>
           <a:p>
@@ -6298,16 +6298,16 @@
             </a:pPr>
             <a:r>
               <a:rPr b="1"/>
-              <a:t>Triads (rotating roles) • 45 minutes</a:t>
-            </a:r>
-          </a:p>
-          <a:p>
-            <a:pPr lvl="0" indent="0" marL="0">
-              <a:buNone/>
-            </a:pPr>
-            <a:r>
-              <a:rPr/>
-              <a:t>Each triad member takes a turn in all three roles: interviewer, interviewee (given a FieldPulse dispatcher character card), observer (tallies bias traps).</a:t>
+              <a:t>Quads (rotating roles) • 45 minutes</a:t>
+            </a:r>
+          </a:p>
+          <a:p>
+            <a:pPr lvl="0" indent="0" marL="0">
+              <a:buNone/>
+            </a:pPr>
+            <a:r>
+              <a:rPr/>
+              <a:t>Each quad member takes a turn in all three roles: interviewer, interviewee (given a FieldPulse dispatcher character card), observer (tallies bias traps).</a:t>
             </a:r>
           </a:p>
           <a:p>
@@ -6766,16 +6766,16 @@
             </a:pPr>
             <a:r>
               <a:rPr b="1"/>
-              <a:t>Paired triads • 60 minutes • Readouts</a:t>
-            </a:r>
-          </a:p>
-          <a:p>
-            <a:pPr lvl="0" indent="0" marL="0">
-              <a:buNone/>
-            </a:pPr>
-            <a:r>
-              <a:rPr/>
-              <a:t>Triads pair. Each presents their persona + 2 JTBDs. The other triad plays “skeptical engineer” and runs the stress-test checklist out loud.</a:t>
+              <a:t>Paired quads • 60 minutes • Readouts</a:t>
+            </a:r>
+          </a:p>
+          <a:p>
+            <a:pPr lvl="0" indent="0" marL="0">
+              <a:buNone/>
+            </a:pPr>
+            <a:r>
+              <a:rPr/>
+              <a:t>Quads pair. Each presents their persona + 2 JTBDs. The other quad plays “skeptical engineer” and runs the stress-test checklist out loud.</a:t>
             </a:r>
           </a:p>
           <a:p>
@@ -6892,7 +6892,7 @@
             </a:pPr>
             <a:r>
               <a:rPr/>
-              <a:t>An evidence-tagged persona per triad</a:t>
+              <a:t>An evidence-tagged persona per quad</a:t>
             </a:r>
           </a:p>
           <a:p>
@@ -7897,16 +7897,16 @@
             </a:pPr>
             <a:r>
               <a:rPr b="1"/>
-              <a:t>Triads • 30 minutes</a:t>
-            </a:r>
-          </a:p>
-          <a:p>
-            <a:pPr lvl="0" indent="0" marL="0">
-              <a:buNone/>
-            </a:pPr>
-            <a:r>
-              <a:rPr/>
-              <a:t>Your triad gets 3 real-world personas (sanitized from actual companies). For each:</a:t>
+              <a:t>Quads • 30 minutes</a:t>
+            </a:r>
+          </a:p>
+          <a:p>
+            <a:pPr lvl="0" indent="0" marL="0">
+              <a:buNone/>
+            </a:pPr>
+            <a:r>
+              <a:rPr/>
+              <a:t>Your quad gets 3 real-world personas (sanitized from actual companies). For each:</a:t>
             </a:r>
           </a:p>
           <a:p>

--- a/week-01/presentations/ppts/day-03-building-validating-personas.pptx
+++ b/week-01/presentations/ppts/day-03-building-validating-personas.pptx
@@ -5788,7 +5788,7 @@
             </a:pPr>
             <a:r>
               <a:rPr b="1"/>
-              <a:t>Quads • 45 minutes</a:t>
+              <a:t>Quads • 50 minutes</a:t>
             </a:r>
           </a:p>
           <a:p>
@@ -6298,7 +6298,7 @@
             </a:pPr>
             <a:r>
               <a:rPr b="1"/>
-              <a:t>Quads (rotating roles) • 45 minutes</a:t>
+              <a:t>Quads (rotating roles) • 50 minutes</a:t>
             </a:r>
           </a:p>
           <a:p>
@@ -7897,7 +7897,7 @@
             </a:pPr>
             <a:r>
               <a:rPr b="1"/>
-              <a:t>Quads • 30 minutes</a:t>
+              <a:t>Quads • 45 minutes</a:t>
             </a:r>
           </a:p>
           <a:p>

--- a/week-01/presentations/ppts/day-03-building-validating-personas.pptx
+++ b/week-01/presentations/ppts/day-03-building-validating-personas.pptx
@@ -5833,7 +5833,7 @@
             </a:pPr>
             <a:r>
               <a:rPr/>
-              <a:t>⏱ 10 min plan · 25 min draft · 10 min mark validation targets</a:t>
+              <a:t>⏱ 10 min plan · 30 min draft · 10 min mark validation targets</a:t>
             </a:r>
           </a:p>
         </p:txBody>
@@ -6343,7 +6343,7 @@
             </a:pPr>
             <a:r>
               <a:rPr/>
-              <a:t>⏱ 30 min rotations · 15 min synthesize</a:t>
+              <a:t>⏱ 30 min rotations · 20 min synthesize</a:t>
             </a:r>
           </a:p>
         </p:txBody>
@@ -7942,7 +7942,7 @@
             </a:pPr>
             <a:r>
               <a:rPr/>
-              <a:t>⏱ 5 min read · 15 min mark up · 10 min rewrite</a:t>
+              <a:t>⏱ 5 min read · 30 min mark up · 10 min rewrite</a:t>
             </a:r>
           </a:p>
         </p:txBody>
